--- a/docs/presentasi-aplikasi-sisd232.pptx
+++ b/docs/presentasi-aplikasi-sisd232.pptx
@@ -3651,8 +3651,8 @@
         </p:blipFill>
         <p:spPr>
           <a:xfrm>
-            <a:off x="841248" y="2122551"/>
-            <a:ext cx="5074920" cy="3637025"/>
+            <a:off x="855061" y="1965960"/>
+            <a:ext cx="5047293" cy="3950208"/>
           </a:xfrm>
           <a:prstGeom prst="rect">
             <a:avLst/>
@@ -3720,8 +3720,8 @@
         </p:blipFill>
         <p:spPr>
           <a:xfrm>
-            <a:off x="6510528" y="2258314"/>
-            <a:ext cx="4846320" cy="3365500"/>
+            <a:off x="6510528" y="2185955"/>
+            <a:ext cx="4846320" cy="3510216"/>
           </a:xfrm>
           <a:prstGeom prst="rect">
             <a:avLst/>
@@ -4111,8 +4111,8 @@
         </p:blipFill>
         <p:spPr>
           <a:xfrm>
-            <a:off x="2048357" y="1920240"/>
-            <a:ext cx="4452925" cy="4041648"/>
+            <a:off x="3164138" y="1920240"/>
+            <a:ext cx="2221363" cy="4041648"/>
           </a:xfrm>
           <a:prstGeom prst="rect">
             <a:avLst/>
@@ -4521,8 +4521,8 @@
         </p:blipFill>
         <p:spPr>
           <a:xfrm>
-            <a:off x="944062" y="1920240"/>
-            <a:ext cx="4878435" cy="4041648"/>
+            <a:off x="1496129" y="1920240"/>
+            <a:ext cx="3774301" cy="4041648"/>
           </a:xfrm>
           <a:prstGeom prst="rect">
             <a:avLst/>
@@ -4590,8 +4590,8 @@
         </p:blipFill>
         <p:spPr>
           <a:xfrm>
-            <a:off x="6622122" y="1920240"/>
-            <a:ext cx="4659706" cy="4041648"/>
+            <a:off x="7074565" y="1920240"/>
+            <a:ext cx="3754821" cy="4041648"/>
           </a:xfrm>
           <a:prstGeom prst="rect">
             <a:avLst/>
@@ -4981,8 +4981,8 @@
         </p:blipFill>
         <p:spPr>
           <a:xfrm>
-            <a:off x="1751590" y="1901952"/>
-            <a:ext cx="1343139" cy="3950208"/>
+            <a:off x="1510493" y="1901952"/>
+            <a:ext cx="1825333" cy="3950208"/>
           </a:xfrm>
           <a:prstGeom prst="rect">
             <a:avLst/>
@@ -5088,7 +5088,7 @@
       </p:sp>
       <p:pic>
         <p:nvPicPr>
-          <p:cNvPr id="9" name="Picture 8" descr="mobile-guru-input-nilai-terisi.png"/>
+          <p:cNvPr id="9" name="Picture 8" descr="mobile-admin-siswa.png"/>
           <p:cNvPicPr>
             <a:picLocks noChangeAspect="1"/>
           </p:cNvPicPr>
@@ -5102,8 +5102,8 @@
         </p:blipFill>
         <p:spPr>
           <a:xfrm>
-            <a:off x="5275330" y="1901952"/>
-            <a:ext cx="1702299" cy="3950208"/>
+            <a:off x="5213813" y="1901952"/>
+            <a:ext cx="1825333" cy="3950208"/>
           </a:xfrm>
           <a:prstGeom prst="rect">
             <a:avLst/>
@@ -5157,7 +5157,7 @@
                 </a:solidFill>
                 <a:latin typeface="Aptos"/>
               </a:rPr>
-              <a:t>INPUT NILAI</a:t>
+              <a:t>TABEL ADMIN</a:t>
             </a:r>
           </a:p>
         </p:txBody>
@@ -6186,7 +6186,7 @@
                 </a:solidFill>
                 <a:latin typeface="Aptos"/>
               </a:rPr>
-              <a:t>18 test dan 76 assertion memastikan aturan penting berjalan.</a:t>
+              <a:t>51 test dan 371 assertion memastikan aturan penting berjalan.</a:t>
             </a:r>
           </a:p>
         </p:txBody>
@@ -6417,8 +6417,8 @@
         </p:nvSpPr>
         <p:spPr>
           <a:xfrm>
-            <a:off x="685800" y="2148840"/>
-            <a:ext cx="1965960" cy="2423160"/>
+            <a:off x="502920" y="2148840"/>
+            <a:ext cx="1664208" cy="2423160"/>
           </a:xfrm>
           <a:prstGeom prst="roundRect">
             <a:avLst/>
@@ -6462,7 +6462,7 @@
         </p:nvSpPr>
         <p:spPr>
           <a:xfrm>
-            <a:off x="1307592" y="2450592"/>
+            <a:off x="978408" y="2450592"/>
             <a:ext cx="713232" cy="713232"/>
           </a:xfrm>
           <a:prstGeom prst="ellipse">
@@ -6505,7 +6505,7 @@
         </p:nvSpPr>
         <p:spPr>
           <a:xfrm>
-            <a:off x="1307592" y="2624328"/>
+            <a:off x="978408" y="2624328"/>
             <a:ext cx="713232" cy="256032"/>
           </a:xfrm>
           <a:prstGeom prst="rect">
@@ -6540,8 +6540,8 @@
         </p:nvSpPr>
         <p:spPr>
           <a:xfrm>
-            <a:off x="850392" y="3383280"/>
-            <a:ext cx="1645920" cy="320040"/>
+            <a:off x="603504" y="3383280"/>
+            <a:ext cx="1463040" cy="320040"/>
           </a:xfrm>
           <a:prstGeom prst="rect">
             <a:avLst/>
@@ -6556,7 +6556,7 @@
           <a:p>
             <a:pPr algn="ctr"/>
             <a:r>
-              <a:rPr sz="1600" b="1">
+              <a:rPr sz="1500" b="1">
                 <a:solidFill>
                   <a:srgbClr val="0F172A"/>
                 </a:solidFill>
@@ -6575,8 +6575,8 @@
         </p:nvSpPr>
         <p:spPr>
           <a:xfrm>
-            <a:off x="850392" y="3822191"/>
-            <a:ext cx="1645920" cy="530352"/>
+            <a:off x="603504" y="3822191"/>
+            <a:ext cx="1463040" cy="530352"/>
           </a:xfrm>
           <a:prstGeom prst="rect">
             <a:avLst/>
@@ -6591,7 +6591,7 @@
           <a:p>
             <a:pPr algn="ctr"/>
             <a:r>
-              <a:rPr sz="1100" b="0">
+              <a:rPr sz="1000" b="0">
                 <a:solidFill>
                   <a:srgbClr val="475569"/>
                 </a:solidFill>
@@ -6610,8 +6610,8 @@
         </p:nvSpPr>
         <p:spPr>
           <a:xfrm>
-            <a:off x="2670048" y="2953512"/>
-            <a:ext cx="274320" cy="320040"/>
+            <a:off x="2185416" y="2953512"/>
+            <a:ext cx="228600" cy="320040"/>
           </a:xfrm>
           <a:prstGeom prst="chevron">
             <a:avLst/>
@@ -6653,8 +6653,8 @@
         </p:nvSpPr>
         <p:spPr>
           <a:xfrm>
-            <a:off x="2953512" y="2148840"/>
-            <a:ext cx="1965960" cy="2423160"/>
+            <a:off x="2441448" y="2148840"/>
+            <a:ext cx="1664208" cy="2423160"/>
           </a:xfrm>
           <a:prstGeom prst="roundRect">
             <a:avLst/>
@@ -6698,7 +6698,7 @@
         </p:nvSpPr>
         <p:spPr>
           <a:xfrm>
-            <a:off x="3575304" y="2450592"/>
+            <a:off x="2916936" y="2450592"/>
             <a:ext cx="713232" cy="713232"/>
           </a:xfrm>
           <a:prstGeom prst="ellipse">
@@ -6741,7 +6741,7 @@
         </p:nvSpPr>
         <p:spPr>
           <a:xfrm>
-            <a:off x="3575304" y="2624328"/>
+            <a:off x="2916936" y="2624328"/>
             <a:ext cx="713232" cy="256032"/>
           </a:xfrm>
           <a:prstGeom prst="rect">
@@ -6776,8 +6776,8 @@
         </p:nvSpPr>
         <p:spPr>
           <a:xfrm>
-            <a:off x="3118104" y="3383280"/>
-            <a:ext cx="1645920" cy="320040"/>
+            <a:off x="2542032" y="3383280"/>
+            <a:ext cx="1463040" cy="320040"/>
           </a:xfrm>
           <a:prstGeom prst="rect">
             <a:avLst/>
@@ -6792,7 +6792,7 @@
           <a:p>
             <a:pPr algn="ctr"/>
             <a:r>
-              <a:rPr sz="1600" b="1">
+              <a:rPr sz="1500" b="1">
                 <a:solidFill>
                   <a:srgbClr val="0F172A"/>
                 </a:solidFill>
@@ -6811,8 +6811,8 @@
         </p:nvSpPr>
         <p:spPr>
           <a:xfrm>
-            <a:off x="3118104" y="3822191"/>
-            <a:ext cx="1645920" cy="530352"/>
+            <a:off x="2542032" y="3822191"/>
+            <a:ext cx="1463040" cy="530352"/>
           </a:xfrm>
           <a:prstGeom prst="rect">
             <a:avLst/>
@@ -6827,7 +6827,7 @@
           <a:p>
             <a:pPr algn="ctr"/>
             <a:r>
-              <a:rPr sz="1100" b="0">
+              <a:rPr sz="1000" b="0">
                 <a:solidFill>
                   <a:srgbClr val="475569"/>
                 </a:solidFill>
@@ -6846,8 +6846,8 @@
         </p:nvSpPr>
         <p:spPr>
           <a:xfrm>
-            <a:off x="4937760" y="2953512"/>
-            <a:ext cx="274320" cy="320040"/>
+            <a:off x="4123944" y="2953512"/>
+            <a:ext cx="228600" cy="320040"/>
           </a:xfrm>
           <a:prstGeom prst="chevron">
             <a:avLst/>
@@ -6889,8 +6889,8 @@
         </p:nvSpPr>
         <p:spPr>
           <a:xfrm>
-            <a:off x="5221224" y="2148840"/>
-            <a:ext cx="1965960" cy="2423160"/>
+            <a:off x="4379976" y="2148840"/>
+            <a:ext cx="1664208" cy="2423160"/>
           </a:xfrm>
           <a:prstGeom prst="roundRect">
             <a:avLst/>
@@ -6934,7 +6934,7 @@
         </p:nvSpPr>
         <p:spPr>
           <a:xfrm>
-            <a:off x="5843016" y="2450592"/>
+            <a:off x="4855464" y="2450592"/>
             <a:ext cx="713232" cy="713232"/>
           </a:xfrm>
           <a:prstGeom prst="ellipse">
@@ -6977,7 +6977,7 @@
         </p:nvSpPr>
         <p:spPr>
           <a:xfrm>
-            <a:off x="5843016" y="2624328"/>
+            <a:off x="4855464" y="2624328"/>
             <a:ext cx="713232" cy="256032"/>
           </a:xfrm>
           <a:prstGeom prst="rect">
@@ -7012,8 +7012,8 @@
         </p:nvSpPr>
         <p:spPr>
           <a:xfrm>
-            <a:off x="5385816" y="3383280"/>
-            <a:ext cx="1645920" cy="320040"/>
+            <a:off x="4480560" y="3383280"/>
+            <a:ext cx="1463040" cy="320040"/>
           </a:xfrm>
           <a:prstGeom prst="rect">
             <a:avLst/>
@@ -7028,13 +7028,13 @@
           <a:p>
             <a:pPr algn="ctr"/>
             <a:r>
-              <a:rPr sz="1600" b="1">
+              <a:rPr sz="1500" b="1">
                 <a:solidFill>
                   <a:srgbClr val="0F172A"/>
                 </a:solidFill>
                 <a:latin typeface="Aptos"/>
               </a:rPr>
-              <a:t>Jadwal</a:t>
+              <a:t>Data</a:t>
             </a:r>
           </a:p>
         </p:txBody>
@@ -7047,8 +7047,8 @@
         </p:nvSpPr>
         <p:spPr>
           <a:xfrm>
-            <a:off x="5385816" y="3822191"/>
-            <a:ext cx="1645920" cy="530352"/>
+            <a:off x="4480560" y="3822191"/>
+            <a:ext cx="1463040" cy="530352"/>
           </a:xfrm>
           <a:prstGeom prst="rect">
             <a:avLst/>
@@ -7063,13 +7063,13 @@
           <a:p>
             <a:pPr algn="ctr"/>
             <a:r>
-              <a:rPr sz="1100" b="0">
+              <a:rPr sz="1000" b="0">
                 <a:solidFill>
                   <a:srgbClr val="475569"/>
                 </a:solidFill>
                 <a:latin typeface="Aptos"/>
               </a:rPr>
-              <a:t>Tunjukkan filter dan validasi bentrok.</a:t>
+              <a:t>Tunjukkan anggota kelas dan urutan jam.</a:t>
             </a:r>
           </a:p>
         </p:txBody>
@@ -7082,8 +7082,8 @@
         </p:nvSpPr>
         <p:spPr>
           <a:xfrm>
-            <a:off x="7205472" y="2953512"/>
-            <a:ext cx="274320" cy="320040"/>
+            <a:off x="6062472" y="2953512"/>
+            <a:ext cx="228600" cy="320040"/>
           </a:xfrm>
           <a:prstGeom prst="chevron">
             <a:avLst/>
@@ -7125,8 +7125,8 @@
         </p:nvSpPr>
         <p:spPr>
           <a:xfrm>
-            <a:off x="7488936" y="2148840"/>
-            <a:ext cx="1965960" cy="2423160"/>
+            <a:off x="6318504" y="2148840"/>
+            <a:ext cx="1664208" cy="2423160"/>
           </a:xfrm>
           <a:prstGeom prst="roundRect">
             <a:avLst/>
@@ -7170,7 +7170,7 @@
         </p:nvSpPr>
         <p:spPr>
           <a:xfrm>
-            <a:off x="8110727" y="2450592"/>
+            <a:off x="6793992" y="2450592"/>
             <a:ext cx="713232" cy="713232"/>
           </a:xfrm>
           <a:prstGeom prst="ellipse">
@@ -7213,7 +7213,7 @@
         </p:nvSpPr>
         <p:spPr>
           <a:xfrm>
-            <a:off x="8110727" y="2624328"/>
+            <a:off x="6793992" y="2624328"/>
             <a:ext cx="713232" cy="256032"/>
           </a:xfrm>
           <a:prstGeom prst="rect">
@@ -7248,8 +7248,8 @@
         </p:nvSpPr>
         <p:spPr>
           <a:xfrm>
-            <a:off x="7653527" y="3383280"/>
-            <a:ext cx="1645920" cy="320040"/>
+            <a:off x="6419088" y="3383280"/>
+            <a:ext cx="1463040" cy="320040"/>
           </a:xfrm>
           <a:prstGeom prst="rect">
             <a:avLst/>
@@ -7264,13 +7264,13 @@
           <a:p>
             <a:pPr algn="ctr"/>
             <a:r>
-              <a:rPr sz="1600" b="1">
+              <a:rPr sz="1500" b="1">
                 <a:solidFill>
                   <a:srgbClr val="0F172A"/>
                 </a:solidFill>
                 <a:latin typeface="Aptos"/>
               </a:rPr>
-              <a:t>Nilai</a:t>
+              <a:t>Jadwal</a:t>
             </a:r>
           </a:p>
         </p:txBody>
@@ -7283,8 +7283,8 @@
         </p:nvSpPr>
         <p:spPr>
           <a:xfrm>
-            <a:off x="7653527" y="3822191"/>
-            <a:ext cx="1645920" cy="530352"/>
+            <a:off x="6419088" y="3822191"/>
+            <a:ext cx="1463040" cy="530352"/>
           </a:xfrm>
           <a:prstGeom prst="rect">
             <a:avLst/>
@@ -7299,13 +7299,13 @@
           <a:p>
             <a:pPr algn="ctr"/>
             <a:r>
-              <a:rPr sz="1100" b="0">
+              <a:rPr sz="1000" b="0">
                 <a:solidFill>
                   <a:srgbClr val="475569"/>
                 </a:solidFill>
                 <a:latin typeface="Aptos"/>
               </a:rPr>
-              <a:t>Masuk sebagai Guru dan isi nilai massal.</a:t>
+              <a:t>Tunjukkan pilihan bertingkat dan bentrok.</a:t>
             </a:r>
           </a:p>
         </p:txBody>
@@ -7318,8 +7318,8 @@
         </p:nvSpPr>
         <p:spPr>
           <a:xfrm>
-            <a:off x="9473184" y="2953512"/>
-            <a:ext cx="274320" cy="320040"/>
+            <a:off x="8001000" y="2953512"/>
+            <a:ext cx="228600" cy="320040"/>
           </a:xfrm>
           <a:prstGeom prst="chevron">
             <a:avLst/>
@@ -7361,8 +7361,8 @@
         </p:nvSpPr>
         <p:spPr>
           <a:xfrm>
-            <a:off x="9756648" y="2148840"/>
-            <a:ext cx="1965960" cy="2423160"/>
+            <a:off x="8257032" y="2148840"/>
+            <a:ext cx="1664208" cy="2423160"/>
           </a:xfrm>
           <a:prstGeom prst="roundRect">
             <a:avLst/>
@@ -7406,7 +7406,7 @@
         </p:nvSpPr>
         <p:spPr>
           <a:xfrm>
-            <a:off x="10378440" y="2450592"/>
+            <a:off x="8732520" y="2450592"/>
             <a:ext cx="713232" cy="713232"/>
           </a:xfrm>
           <a:prstGeom prst="ellipse">
@@ -7449,7 +7449,7 @@
         </p:nvSpPr>
         <p:spPr>
           <a:xfrm>
-            <a:off x="10378440" y="2624328"/>
+            <a:off x="8732520" y="2624328"/>
             <a:ext cx="713232" cy="256032"/>
           </a:xfrm>
           <a:prstGeom prst="rect">
@@ -7484,8 +7484,8 @@
         </p:nvSpPr>
         <p:spPr>
           <a:xfrm>
-            <a:off x="9921240" y="3383280"/>
-            <a:ext cx="1645920" cy="320040"/>
+            <a:off x="8357616" y="3383280"/>
+            <a:ext cx="1463040" cy="320040"/>
           </a:xfrm>
           <a:prstGeom prst="rect">
             <a:avLst/>
@@ -7500,12 +7500,248 @@
           <a:p>
             <a:pPr algn="ctr"/>
             <a:r>
-              <a:rPr sz="1600" b="1">
+              <a:rPr sz="1500" b="1">
                 <a:solidFill>
                   <a:srgbClr val="0F172A"/>
                 </a:solidFill>
                 <a:latin typeface="Aptos"/>
               </a:rPr>
+              <a:t>Nilai</a:t>
+            </a:r>
+          </a:p>
+        </p:txBody>
+      </p:sp>
+      <p:sp>
+        <p:nvSpPr>
+          <p:cNvPr id="33" name="TextBox 32"/>
+          <p:cNvSpPr txBox="1"/>
+          <p:nvPr/>
+        </p:nvSpPr>
+        <p:spPr>
+          <a:xfrm>
+            <a:off x="8357616" y="3822191"/>
+            <a:ext cx="1463040" cy="530352"/>
+          </a:xfrm>
+          <a:prstGeom prst="rect">
+            <a:avLst/>
+          </a:prstGeom>
+          <a:noFill/>
+        </p:spPr>
+        <p:txBody>
+          <a:bodyPr wrap="square" anchor="t">
+            <a:spAutoFit/>
+          </a:bodyPr>
+          <a:lstStyle/>
+          <a:p>
+            <a:pPr algn="ctr"/>
+            <a:r>
+              <a:rPr sz="1000" b="0">
+                <a:solidFill>
+                  <a:srgbClr val="475569"/>
+                </a:solidFill>
+                <a:latin typeface="Aptos"/>
+              </a:rPr>
+              <a:t>Masuk sebagai Guru dan isi nilai massal.</a:t>
+            </a:r>
+          </a:p>
+        </p:txBody>
+      </p:sp>
+      <p:sp>
+        <p:nvSpPr>
+          <p:cNvPr id="34" name="Chevron 33"/>
+          <p:cNvSpPr/>
+          <p:nvPr/>
+        </p:nvSpPr>
+        <p:spPr>
+          <a:xfrm>
+            <a:off x="9939528" y="2953512"/>
+            <a:ext cx="228600" cy="320040"/>
+          </a:xfrm>
+          <a:prstGeom prst="chevron">
+            <a:avLst/>
+          </a:prstGeom>
+          <a:solidFill>
+            <a:srgbClr val="BAE6FD"/>
+          </a:solidFill>
+          <a:ln>
+            <a:noFill/>
+          </a:ln>
+        </p:spPr>
+        <p:style>
+          <a:lnRef idx="1">
+            <a:schemeClr val="accent1"/>
+          </a:lnRef>
+          <a:fillRef idx="3">
+            <a:schemeClr val="accent1"/>
+          </a:fillRef>
+          <a:effectRef idx="2">
+            <a:schemeClr val="accent1"/>
+          </a:effectRef>
+          <a:fontRef idx="minor">
+            <a:schemeClr val="lt1"/>
+          </a:fontRef>
+        </p:style>
+        <p:txBody>
+          <a:bodyPr rtlCol="0" anchor="ctr"/>
+          <a:lstStyle/>
+          <a:p>
+            <a:pPr algn="ctr"/>
+          </a:p>
+        </p:txBody>
+      </p:sp>
+      <p:sp>
+        <p:nvSpPr>
+          <p:cNvPr id="35" name="Rounded Rectangle 34"/>
+          <p:cNvSpPr/>
+          <p:nvPr/>
+        </p:nvSpPr>
+        <p:spPr>
+          <a:xfrm>
+            <a:off x="10195560" y="2148840"/>
+            <a:ext cx="1664208" cy="2423160"/>
+          </a:xfrm>
+          <a:prstGeom prst="roundRect">
+            <a:avLst/>
+          </a:prstGeom>
+          <a:solidFill>
+            <a:srgbClr val="FFFFFF"/>
+          </a:solidFill>
+          <a:ln w="12700">
+            <a:solidFill>
+              <a:srgbClr val="E2E8F0"/>
+            </a:solidFill>
+          </a:ln>
+        </p:spPr>
+        <p:style>
+          <a:lnRef idx="1">
+            <a:schemeClr val="accent1"/>
+          </a:lnRef>
+          <a:fillRef idx="3">
+            <a:schemeClr val="accent1"/>
+          </a:fillRef>
+          <a:effectRef idx="2">
+            <a:schemeClr val="accent1"/>
+          </a:effectRef>
+          <a:fontRef idx="minor">
+            <a:schemeClr val="lt1"/>
+          </a:fontRef>
+        </p:style>
+        <p:txBody>
+          <a:bodyPr rtlCol="0" anchor="ctr"/>
+          <a:lstStyle/>
+          <a:p>
+            <a:pPr algn="ctr"/>
+          </a:p>
+        </p:txBody>
+      </p:sp>
+      <p:sp>
+        <p:nvSpPr>
+          <p:cNvPr id="36" name="Oval 35"/>
+          <p:cNvSpPr/>
+          <p:nvPr/>
+        </p:nvSpPr>
+        <p:spPr>
+          <a:xfrm>
+            <a:off x="10671048" y="2450592"/>
+            <a:ext cx="713232" cy="713232"/>
+          </a:xfrm>
+          <a:prstGeom prst="ellipse">
+            <a:avLst/>
+          </a:prstGeom>
+          <a:solidFill>
+            <a:srgbClr val="0284C7"/>
+          </a:solidFill>
+          <a:ln>
+            <a:noFill/>
+          </a:ln>
+        </p:spPr>
+        <p:style>
+          <a:lnRef idx="1">
+            <a:schemeClr val="accent1"/>
+          </a:lnRef>
+          <a:fillRef idx="3">
+            <a:schemeClr val="accent1"/>
+          </a:fillRef>
+          <a:effectRef idx="2">
+            <a:schemeClr val="accent1"/>
+          </a:effectRef>
+          <a:fontRef idx="minor">
+            <a:schemeClr val="lt1"/>
+          </a:fontRef>
+        </p:style>
+        <p:txBody>
+          <a:bodyPr rtlCol="0" anchor="ctr"/>
+          <a:lstStyle/>
+          <a:p>
+            <a:pPr algn="ctr"/>
+          </a:p>
+        </p:txBody>
+      </p:sp>
+      <p:sp>
+        <p:nvSpPr>
+          <p:cNvPr id="37" name="TextBox 36"/>
+          <p:cNvSpPr txBox="1"/>
+          <p:nvPr/>
+        </p:nvSpPr>
+        <p:spPr>
+          <a:xfrm>
+            <a:off x="10671048" y="2624328"/>
+            <a:ext cx="713232" cy="256032"/>
+          </a:xfrm>
+          <a:prstGeom prst="rect">
+            <a:avLst/>
+          </a:prstGeom>
+          <a:noFill/>
+        </p:spPr>
+        <p:txBody>
+          <a:bodyPr wrap="square" anchor="t">
+            <a:spAutoFit/>
+          </a:bodyPr>
+          <a:lstStyle/>
+          <a:p>
+            <a:pPr algn="ctr"/>
+            <a:r>
+              <a:rPr sz="1800" b="1">
+                <a:solidFill>
+                  <a:srgbClr val="FFFFFF"/>
+                </a:solidFill>
+                <a:latin typeface="Aptos"/>
+              </a:rPr>
+              <a:t>6</a:t>
+            </a:r>
+          </a:p>
+        </p:txBody>
+      </p:sp>
+      <p:sp>
+        <p:nvSpPr>
+          <p:cNvPr id="38" name="TextBox 37"/>
+          <p:cNvSpPr txBox="1"/>
+          <p:nvPr/>
+        </p:nvSpPr>
+        <p:spPr>
+          <a:xfrm>
+            <a:off x="10296144" y="3383280"/>
+            <a:ext cx="1463040" cy="320040"/>
+          </a:xfrm>
+          <a:prstGeom prst="rect">
+            <a:avLst/>
+          </a:prstGeom>
+          <a:noFill/>
+        </p:spPr>
+        <p:txBody>
+          <a:bodyPr wrap="square" anchor="t">
+            <a:spAutoFit/>
+          </a:bodyPr>
+          <a:lstStyle/>
+          <a:p>
+            <a:pPr algn="ctr"/>
+            <a:r>
+              <a:rPr sz="1500" b="1">
+                <a:solidFill>
+                  <a:srgbClr val="0F172A"/>
+                </a:solidFill>
+                <a:latin typeface="Aptos"/>
+              </a:rPr>
               <a:t>Hasil</a:t>
             </a:r>
           </a:p>
@@ -7513,14 +7749,14 @@
       </p:sp>
       <p:sp>
         <p:nvSpPr>
-          <p:cNvPr id="33" name="TextBox 32"/>
-          <p:cNvSpPr txBox="1"/>
-          <p:nvPr/>
-        </p:nvSpPr>
-        <p:spPr>
-          <a:xfrm>
-            <a:off x="9921240" y="3822191"/>
-            <a:ext cx="1645920" cy="530352"/>
+          <p:cNvPr id="39" name="TextBox 38"/>
+          <p:cNvSpPr txBox="1"/>
+          <p:nvPr/>
+        </p:nvSpPr>
+        <p:spPr>
+          <a:xfrm>
+            <a:off x="10296144" y="3822191"/>
+            <a:ext cx="1463040" cy="530352"/>
           </a:xfrm>
           <a:prstGeom prst="rect">
             <a:avLst/>
@@ -7535,20 +7771,20 @@
           <a:p>
             <a:pPr algn="ctr"/>
             <a:r>
-              <a:rPr sz="1100" b="0">
+              <a:rPr sz="1000" b="0">
                 <a:solidFill>
                   <a:srgbClr val="475569"/>
                 </a:solidFill>
                 <a:latin typeface="Aptos"/>
               </a:rPr>
-              <a:t>Masuk sebagai Siswa, lalu buka laporan PDF.</a:t>
-            </a:r>
-          </a:p>
-        </p:txBody>
-      </p:sp>
-      <p:sp>
-        <p:nvSpPr>
-          <p:cNvPr id="34" name="Rounded Rectangle 33"/>
+              <a:t>Buka Nilai Saya dan laporan PDF.</a:t>
+            </a:r>
+          </a:p>
+        </p:txBody>
+      </p:sp>
+      <p:sp>
+        <p:nvSpPr>
+          <p:cNvPr id="40" name="Rounded Rectangle 39"/>
           <p:cNvSpPr/>
           <p:nvPr/>
         </p:nvSpPr>
@@ -7593,7 +7829,7 @@
       </p:sp>
       <p:sp>
         <p:nvSpPr>
-          <p:cNvPr id="35" name="TextBox 34"/>
+          <p:cNvPr id="41" name="TextBox 40"/>
           <p:cNvSpPr txBox="1"/>
           <p:nvPr/>
         </p:nvSpPr>
@@ -7628,7 +7864,7 @@
       </p:sp>
       <p:sp>
         <p:nvSpPr>
-          <p:cNvPr id="36" name="TextBox 35"/>
+          <p:cNvPr id="42" name="TextBox 41"/>
           <p:cNvSpPr txBox="1"/>
           <p:nvPr/>
         </p:nvSpPr>
@@ -7663,7 +7899,7 @@
       </p:sp>
       <p:sp>
         <p:nvSpPr>
-          <p:cNvPr id="37" name="TextBox 36"/>
+          <p:cNvPr id="43" name="TextBox 42"/>
           <p:cNvSpPr txBox="1"/>
           <p:nvPr/>
         </p:nvSpPr>
@@ -8950,8 +9186,8 @@
         </p:blipFill>
         <p:spPr>
           <a:xfrm>
-            <a:off x="1035556" y="2011680"/>
-            <a:ext cx="4009647" cy="3639312"/>
+            <a:off x="2040263" y="2011680"/>
+            <a:ext cx="2000232" cy="3639312"/>
           </a:xfrm>
           <a:prstGeom prst="rect">
             <a:avLst/>
@@ -11073,8 +11309,8 @@
         </p:blipFill>
         <p:spPr>
           <a:xfrm>
-            <a:off x="2071217" y="1920240"/>
-            <a:ext cx="4452925" cy="4041648"/>
+            <a:off x="3186998" y="1920240"/>
+            <a:ext cx="2221363" cy="4041648"/>
           </a:xfrm>
           <a:prstGeom prst="rect">
             <a:avLst/>
@@ -11124,7 +11360,7 @@
                 </a:solidFill>
                 <a:latin typeface="Aptos"/>
               </a:rPr>
-              <a:t>guru, siswa, kelas, mata pelajaran, jadwal, dan nilai.</a:t>
+              <a:t>guru, siswa, kelas, mata pelajaran, pengajaran, dan jadwal.</a:t>
             </a:r>
           </a:p>
           <a:p>
@@ -11165,7 +11401,7 @@
                 </a:solidFill>
                 <a:latin typeface="Aptos"/>
               </a:rPr>
-              <a:t>Jadwal hari ini - </a:t>
+              <a:t>Status akademik - </a:t>
             </a:r>
             <a:r>
               <a:rPr sz="1600">
@@ -11174,7 +11410,7 @@
                 </a:solidFill>
                 <a:latin typeface="Aptos"/>
               </a:rPr>
-              <a:t>informasi kegiatan akademik terbaru.</a:t>
+              <a:t>progres nilai, penempatan siswa, dan kegiatan hari ini.</a:t>
             </a:r>
           </a:p>
         </p:txBody>
@@ -12542,7 +12778,7 @@
                 </a:solidFill>
                 <a:latin typeface="Aptos"/>
               </a:rPr>
-              <a:t>Pencarian dan filter</a:t>
+              <a:t>Tabel modern</a:t>
             </a:r>
           </a:p>
         </p:txBody>
@@ -12556,7 +12792,7 @@
         <p:spPr>
           <a:xfrm>
             <a:off x="6629400" y="4910328"/>
-            <a:ext cx="4526280" cy="384048"/>
+            <a:ext cx="4526280" cy="457200"/>
           </a:xfrm>
           <a:prstGeom prst="rect">
             <a:avLst/>
@@ -12577,7 +12813,7 @@
                 </a:solidFill>
                 <a:latin typeface="Aptos"/>
               </a:rPr>
-              <a:t>Tabel dapat dicari, diurutkan, disaring, dan dibagi per halaman.</a:t>
+              <a:t>Search, filter, sorting, bulk action, URL state, dan urutan jam drag-and-drop.</a:t>
             </a:r>
           </a:p>
         </p:txBody>
@@ -12861,8 +13097,8 @@
         </p:blipFill>
         <p:spPr>
           <a:xfrm>
-            <a:off x="1386485" y="1920240"/>
-            <a:ext cx="5639508" cy="4041648"/>
+            <a:off x="2061813" y="1920240"/>
+            <a:ext cx="4288852" cy="4041648"/>
           </a:xfrm>
           <a:prstGeom prst="rect">
             <a:avLst/>
@@ -13598,8 +13834,8 @@
         </p:blipFill>
         <p:spPr>
           <a:xfrm>
-            <a:off x="1547713" y="1920240"/>
-            <a:ext cx="5819973" cy="4041648"/>
+            <a:off x="1916227" y="1920240"/>
+            <a:ext cx="5082945" cy="4041648"/>
           </a:xfrm>
           <a:prstGeom prst="rect">
             <a:avLst/>
